--- a/guide etc/아두이노 가이드.pptx
+++ b/guide etc/아두이노 가이드.pptx
@@ -260,7 +260,7 @@
           <a:p>
             <a:fld id="{5E94D0E8-7831-48C8-A39E-1245E89BF22F}" type="datetimeFigureOut">
               <a:rPr lang="ko-KR" altLang="en-US" smtClean="0"/>
-              <a:t>2026-05-29</a:t>
+              <a:t>2026-06-04</a:t>
             </a:fld>
             <a:endParaRPr lang="ko-KR" altLang="en-US"/>
           </a:p>
@@ -430,7 +430,7 @@
           <a:p>
             <a:fld id="{5E94D0E8-7831-48C8-A39E-1245E89BF22F}" type="datetimeFigureOut">
               <a:rPr lang="ko-KR" altLang="en-US" smtClean="0"/>
-              <a:t>2026-05-29</a:t>
+              <a:t>2026-06-04</a:t>
             </a:fld>
             <a:endParaRPr lang="ko-KR" altLang="en-US"/>
           </a:p>
@@ -610,7 +610,7 @@
           <a:p>
             <a:fld id="{5E94D0E8-7831-48C8-A39E-1245E89BF22F}" type="datetimeFigureOut">
               <a:rPr lang="ko-KR" altLang="en-US" smtClean="0"/>
-              <a:t>2026-05-29</a:t>
+              <a:t>2026-06-04</a:t>
             </a:fld>
             <a:endParaRPr lang="ko-KR" altLang="en-US"/>
           </a:p>
@@ -780,7 +780,7 @@
           <a:p>
             <a:fld id="{5E94D0E8-7831-48C8-A39E-1245E89BF22F}" type="datetimeFigureOut">
               <a:rPr lang="ko-KR" altLang="en-US" smtClean="0"/>
-              <a:t>2026-05-29</a:t>
+              <a:t>2026-06-04</a:t>
             </a:fld>
             <a:endParaRPr lang="ko-KR" altLang="en-US"/>
           </a:p>
@@ -1026,7 +1026,7 @@
           <a:p>
             <a:fld id="{5E94D0E8-7831-48C8-A39E-1245E89BF22F}" type="datetimeFigureOut">
               <a:rPr lang="ko-KR" altLang="en-US" smtClean="0"/>
-              <a:t>2026-05-29</a:t>
+              <a:t>2026-06-04</a:t>
             </a:fld>
             <a:endParaRPr lang="ko-KR" altLang="en-US"/>
           </a:p>
@@ -1258,7 +1258,7 @@
           <a:p>
             <a:fld id="{5E94D0E8-7831-48C8-A39E-1245E89BF22F}" type="datetimeFigureOut">
               <a:rPr lang="ko-KR" altLang="en-US" smtClean="0"/>
-              <a:t>2026-05-29</a:t>
+              <a:t>2026-06-04</a:t>
             </a:fld>
             <a:endParaRPr lang="ko-KR" altLang="en-US"/>
           </a:p>
@@ -1625,7 +1625,7 @@
           <a:p>
             <a:fld id="{5E94D0E8-7831-48C8-A39E-1245E89BF22F}" type="datetimeFigureOut">
               <a:rPr lang="ko-KR" altLang="en-US" smtClean="0"/>
-              <a:t>2026-05-29</a:t>
+              <a:t>2026-06-04</a:t>
             </a:fld>
             <a:endParaRPr lang="ko-KR" altLang="en-US"/>
           </a:p>
@@ -1743,7 +1743,7 @@
           <a:p>
             <a:fld id="{5E94D0E8-7831-48C8-A39E-1245E89BF22F}" type="datetimeFigureOut">
               <a:rPr lang="ko-KR" altLang="en-US" smtClean="0"/>
-              <a:t>2026-05-29</a:t>
+              <a:t>2026-06-04</a:t>
             </a:fld>
             <a:endParaRPr lang="ko-KR" altLang="en-US"/>
           </a:p>
@@ -1838,7 +1838,7 @@
           <a:p>
             <a:fld id="{5E94D0E8-7831-48C8-A39E-1245E89BF22F}" type="datetimeFigureOut">
               <a:rPr lang="ko-KR" altLang="en-US" smtClean="0"/>
-              <a:t>2026-05-29</a:t>
+              <a:t>2026-06-04</a:t>
             </a:fld>
             <a:endParaRPr lang="ko-KR" altLang="en-US"/>
           </a:p>
@@ -2115,7 +2115,7 @@
           <a:p>
             <a:fld id="{5E94D0E8-7831-48C8-A39E-1245E89BF22F}" type="datetimeFigureOut">
               <a:rPr lang="ko-KR" altLang="en-US" smtClean="0"/>
-              <a:t>2026-05-29</a:t>
+              <a:t>2026-06-04</a:t>
             </a:fld>
             <a:endParaRPr lang="ko-KR" altLang="en-US"/>
           </a:p>
@@ -2368,7 +2368,7 @@
           <a:p>
             <a:fld id="{5E94D0E8-7831-48C8-A39E-1245E89BF22F}" type="datetimeFigureOut">
               <a:rPr lang="ko-KR" altLang="en-US" smtClean="0"/>
-              <a:t>2026-05-29</a:t>
+              <a:t>2026-06-04</a:t>
             </a:fld>
             <a:endParaRPr lang="ko-KR" altLang="en-US"/>
           </a:p>
@@ -2581,7 +2581,7 @@
           <a:p>
             <a:fld id="{5E94D0E8-7831-48C8-A39E-1245E89BF22F}" type="datetimeFigureOut">
               <a:rPr lang="ko-KR" altLang="en-US" smtClean="0"/>
-              <a:t>2026-05-29</a:t>
+              <a:t>2026-06-04</a:t>
             </a:fld>
             <a:endParaRPr lang="ko-KR" altLang="en-US"/>
           </a:p>
@@ -4006,6 +4006,35 @@
           <a:chExt cx="0" cy="0"/>
         </a:xfrm>
       </p:grpSpPr>
+      <p:sp>
+        <p:nvSpPr>
+          <p:cNvPr id="2" name="TextBox 1"/>
+          <p:cNvSpPr txBox="1"/>
+          <p:nvPr/>
+        </p:nvSpPr>
+        <p:spPr>
+          <a:xfrm>
+            <a:off x="2493818" y="2934393"/>
+            <a:ext cx="5461462" cy="369332"/>
+          </a:xfrm>
+          <a:prstGeom prst="rect">
+            <a:avLst/>
+          </a:prstGeom>
+          <a:noFill/>
+        </p:spPr>
+        <p:txBody>
+          <a:bodyPr wrap="square" rtlCol="0">
+            <a:spAutoFit/>
+          </a:bodyPr>
+          <a:lstStyle/>
+          <a:p>
+            <a:r>
+              <a:rPr lang="en-US" altLang="ko-KR" dirty="0"/>
+              <a:t>http://192.168.0.97:81/stream</a:t>
+            </a:r>
+          </a:p>
+        </p:txBody>
+      </p:sp>
     </p:spTree>
     <p:extLst>
       <p:ext uri="{BB962C8B-B14F-4D97-AF65-F5344CB8AC3E}">
